--- a/med_claim_presentation.pptx
+++ b/med_claim_presentation.pptx
@@ -2277,7 +2277,7 @@
                 <a:ea typeface="Inter" pitchFamily="34" charset="-122"/>
                 <a:cs typeface="Inter" pitchFamily="34" charset="-120"/>
               </a:rPr>
-              <a:t>Knowledge Institute Of Technology (KIOT)   •   Department of CSE</a:t>
+              <a:t>Knowledge Institute Of Technology (KIOT)   •   Department of Information Technology (IT)</a:t>
             </a:r>
             <a:endParaRPr lang="en-US" sz="1500" dirty="0"/>
           </a:p>
